--- a/research/poc/PP-04/artifacts/unknown-part-output.pptx
+++ b/research/poc/PP-04/artifacts/unknown-part-output.pptx
@@ -5,7 +5,7 @@
     <p:sldMasterId id="2147483648" r:id="rId1"/>
   </p:sldMasterIdLst>
   <p:sldIdLst>
-    <p:sldId id="256" r:id="Racda6dfb5344406b"/>
+    <p:sldId id="256" r:id="R19629d5c1d88463d"/>
   </p:sldIdLst>
   <p:sldSz cx="9144000" cy="6858000" type="screen4x3"/>
   <p:notesSz cx="6858000" cy="9144000"/>

--- a/research/poc/PP-04/artifacts/unknown-part-output.pptx
+++ b/research/poc/PP-04/artifacts/unknown-part-output.pptx
@@ -5,7 +5,7 @@
     <p:sldMasterId id="2147483648" r:id="rId1"/>
   </p:sldMasterIdLst>
   <p:sldIdLst>
-    <p:sldId id="256" r:id="R19629d5c1d88463d"/>
+    <p:sldId id="256" r:id="R8447580bfaa345da"/>
   </p:sldIdLst>
   <p:sldSz cx="9144000" cy="6858000" type="screen4x3"/>
   <p:notesSz cx="6858000" cy="9144000"/>

--- a/research/poc/PP-04/artifacts/unknown-part-output.pptx
+++ b/research/poc/PP-04/artifacts/unknown-part-output.pptx
@@ -5,7 +5,7 @@
     <p:sldMasterId id="2147483648" r:id="rId1"/>
   </p:sldMasterIdLst>
   <p:sldIdLst>
-    <p:sldId id="256" r:id="R8447580bfaa345da"/>
+    <p:sldId id="256" r:id="Rd268c380df574e81"/>
   </p:sldIdLst>
   <p:sldSz cx="9144000" cy="6858000" type="screen4x3"/>
   <p:notesSz cx="6858000" cy="9144000"/>

--- a/research/poc/PP-04/artifacts/unknown-part-output.pptx
+++ b/research/poc/PP-04/artifacts/unknown-part-output.pptx
@@ -5,7 +5,7 @@
     <p:sldMasterId id="2147483648" r:id="rId1"/>
   </p:sldMasterIdLst>
   <p:sldIdLst>
-    <p:sldId id="256" r:id="Rd268c380df574e81"/>
+    <p:sldId id="256" r:id="Rb0ef2860335b4166"/>
   </p:sldIdLst>
   <p:sldSz cx="9144000" cy="6858000" type="screen4x3"/>
   <p:notesSz cx="6858000" cy="9144000"/>
